--- a/docs/pitch/PMIS-ai-合作簡報-事務所顧問公司-2026-08-19.pptx
+++ b/docs/pitch/PMIS-ai-合作簡報-事務所顧問公司-2026-08-19.pptx
@@ -13371,11 +13371,11 @@
         <p:spPr>
           <a:xfrm>
             <a:off x="658368" y="1481328"/>
-            <a:ext cx="3417722" cy="2103120"/>
+            <a:ext cx="3417722" cy="2011680"/>
           </a:xfrm>
           <a:prstGeom prst="roundRect">
             <a:avLst>
-              <a:gd name="adj" fmla="val 1522"/>
+              <a:gd name="adj" fmla="val 1591"/>
             </a:avLst>
           </a:prstGeom>
           <a:solidFill>
@@ -13644,7 +13644,7 @@
                 <a:ea typeface="Arial" pitchFamily="34" charset="-122"/>
                 <a:cs typeface="Arial" pitchFamily="34" charset="-120"/>
               </a:rPr>
-              <a:t>經手工程獲公共工程金質獎、金品獎</a:t>
+              <a:t>監造報表與缺失追蹤的工時，我自己耗過</a:t>
             </a:r>
             <a:endParaRPr lang="en-US" sz="1100" dirty="0"/>
           </a:p>
@@ -13741,11 +13741,11 @@
         <p:spPr>
           <a:xfrm>
             <a:off x="4386986" y="1481328"/>
-            <a:ext cx="3417722" cy="2103120"/>
+            <a:ext cx="3417722" cy="2011680"/>
           </a:xfrm>
           <a:prstGeom prst="roundRect">
             <a:avLst>
-              <a:gd name="adj" fmla="val 1522"/>
+              <a:gd name="adj" fmla="val 1591"/>
             </a:avLst>
           </a:prstGeom>
           <a:solidFill>
@@ -14111,11 +14111,11 @@
         <p:spPr>
           <a:xfrm>
             <a:off x="8115605" y="1481328"/>
-            <a:ext cx="3417722" cy="2103120"/>
+            <a:ext cx="3417722" cy="2011680"/>
           </a:xfrm>
           <a:prstGeom prst="roundRect">
             <a:avLst>
-              <a:gd name="adj" fmla="val 1522"/>
+              <a:gd name="adj" fmla="val 1591"/>
             </a:avLst>
           </a:prstGeom>
           <a:solidFill>
@@ -14480,12 +14480,121 @@
         </p:nvSpPr>
         <p:spPr>
           <a:xfrm>
-            <a:off x="658368" y="3803904"/>
-            <a:ext cx="10874959" cy="1325880"/>
+            <a:off x="658368" y="3639312"/>
+            <a:ext cx="10874959" cy="566928"/>
           </a:xfrm>
           <a:prstGeom prst="roundRect">
             <a:avLst>
-              <a:gd name="adj" fmla="val 2414"/>
+              <a:gd name="adj" fmla="val 5645"/>
+            </a:avLst>
+          </a:prstGeom>
+          <a:solidFill>
+            <a:srgbClr val="FCE9DC"/>
+          </a:solidFill>
+          <a:ln w="12700">
+            <a:solidFill>
+              <a:srgbClr val="E8630C"/>
+            </a:solidFill>
+            <a:prstDash val="solid"/>
+          </a:ln>
+        </p:spPr>
+      </p:sp>
+      <p:sp>
+        <p:nvSpPr>
+          <p:cNvPr id="34" name="Text 32"/>
+          <p:cNvSpPr/>
+          <p:nvPr/>
+        </p:nvSpPr>
+        <p:spPr>
+          <a:xfrm>
+            <a:off x="932688" y="3639312"/>
+            <a:ext cx="1188720" cy="566928"/>
+          </a:xfrm>
+          <a:prstGeom prst="rect">
+            <a:avLst/>
+          </a:prstGeom>
+          <a:noFill/>
+          <a:ln/>
+        </p:spPr>
+        <p:txBody>
+          <a:bodyPr wrap="square" lIns="0" tIns="0" rIns="0" bIns="0" rtlCol="0" anchor="ctr"/>
+          <a:lstStyle/>
+          <a:p>
+            <a:pPr indent="0" marL="0">
+              <a:buNone/>
+            </a:pPr>
+            <a:r>
+              <a:rPr lang="en-US" sz="1000" b="1" spc="180" kern="0" dirty="0">
+                <a:solidFill>
+                  <a:srgbClr val="C05209"/>
+                </a:solidFill>
+                <a:latin typeface="Arial" pitchFamily="34" charset="0"/>
+                <a:ea typeface="Microsoft JhengHei"/>
+                <a:cs typeface="Microsoft JhengHei"/>
+                <a:ea typeface="Arial" pitchFamily="34" charset="-122"/>
+                <a:cs typeface="Arial" pitchFamily="34" charset="-120"/>
+              </a:rPr>
+              <a:t>工程榮譽</a:t>
+            </a:r>
+            <a:endParaRPr lang="en-US" sz="1000" dirty="0"/>
+          </a:p>
+        </p:txBody>
+      </p:sp>
+      <p:sp>
+        <p:nvSpPr>
+          <p:cNvPr id="35" name="Text 33"/>
+          <p:cNvSpPr/>
+          <p:nvPr/>
+        </p:nvSpPr>
+        <p:spPr>
+          <a:xfrm>
+            <a:off x="2212848" y="3639312"/>
+            <a:ext cx="9046159" cy="566928"/>
+          </a:xfrm>
+          <a:prstGeom prst="rect">
+            <a:avLst/>
+          </a:prstGeom>
+          <a:noFill/>
+          <a:ln/>
+        </p:spPr>
+        <p:txBody>
+          <a:bodyPr wrap="square" lIns="0" tIns="0" rIns="0" bIns="0" rtlCol="0" anchor="ctr"/>
+          <a:lstStyle/>
+          <a:p>
+            <a:pPr indent="0" marL="0">
+              <a:buNone/>
+            </a:pPr>
+            <a:r>
+              <a:rPr lang="en-US" sz="1700" b="1" dirty="0">
+                <a:solidFill>
+                  <a:srgbClr val="1D2B39"/>
+                </a:solidFill>
+                <a:latin typeface="Arial" pitchFamily="34" charset="0"/>
+                <a:ea typeface="Microsoft JhengHei"/>
+                <a:cs typeface="Microsoft JhengHei"/>
+                <a:ea typeface="Arial" pitchFamily="34" charset="-122"/>
+                <a:cs typeface="Arial" pitchFamily="34" charset="-120"/>
+              </a:rPr>
+              <a:t>擔任主辦的工程，獲公共工程金質獎、金品獎</a:t>
+            </a:r>
+            <a:endParaRPr lang="en-US" sz="1700" dirty="0"/>
+          </a:p>
+        </p:txBody>
+      </p:sp>
+      <p:sp>
+        <p:nvSpPr>
+          <p:cNvPr id="36" name="Shape 34"/>
+          <p:cNvSpPr/>
+          <p:nvPr/>
+        </p:nvSpPr>
+        <p:spPr>
+          <a:xfrm>
+            <a:off x="658368" y="4370832"/>
+            <a:ext cx="10874959" cy="1170432"/>
+          </a:xfrm>
+          <a:prstGeom prst="roundRect">
+            <a:avLst>
+              <a:gd name="adj" fmla="val 2734"/>
             </a:avLst>
           </a:prstGeom>
           <a:solidFill>
@@ -14508,13 +14617,13 @@
       </p:sp>
       <p:sp>
         <p:nvSpPr>
-          <p:cNvPr id="34" name="Text 32"/>
-          <p:cNvSpPr/>
-          <p:nvPr/>
-        </p:nvSpPr>
-        <p:spPr>
-          <a:xfrm>
-            <a:off x="877824" y="3968496"/>
+          <p:cNvPr id="37" name="Text 35"/>
+          <p:cNvSpPr/>
+          <p:nvPr/>
+        </p:nvSpPr>
+        <p:spPr>
+          <a:xfrm>
+            <a:off x="877824" y="4535424"/>
             <a:ext cx="10436047" cy="274320"/>
           </a:xfrm>
           <a:prstGeom prst="rect">
@@ -14549,14 +14658,14 @@
       </p:sp>
       <p:sp>
         <p:nvSpPr>
-          <p:cNvPr id="35" name="Text 33"/>
-          <p:cNvSpPr/>
-          <p:nvPr/>
-        </p:nvSpPr>
-        <p:spPr>
-          <a:xfrm>
-            <a:off x="877824" y="4315968"/>
-            <a:ext cx="10436047" cy="667512"/>
+          <p:cNvPr id="38" name="Text 36"/>
+          <p:cNvSpPr/>
+          <p:nvPr/>
+        </p:nvSpPr>
+        <p:spPr>
+          <a:xfrm>
+            <a:off x="877824" y="4882896"/>
+            <a:ext cx="10436047" cy="512064"/>
           </a:xfrm>
           <a:prstGeom prst="rect">
             <a:avLst/>
@@ -14593,18 +14702,18 @@
       </p:sp>
       <p:sp>
         <p:nvSpPr>
-          <p:cNvPr id="36" name="Shape 34"/>
-          <p:cNvSpPr/>
-          <p:nvPr/>
-        </p:nvSpPr>
-        <p:spPr>
-          <a:xfrm>
-            <a:off x="658368" y="5248656"/>
-            <a:ext cx="10874959" cy="548640"/>
+          <p:cNvPr id="39" name="Shape 37"/>
+          <p:cNvSpPr/>
+          <p:nvPr/>
+        </p:nvSpPr>
+        <p:spPr>
+          <a:xfrm>
+            <a:off x="658368" y="5650992"/>
+            <a:ext cx="10874959" cy="457200"/>
           </a:xfrm>
           <a:prstGeom prst="roundRect">
             <a:avLst>
-              <a:gd name="adj" fmla="val 5833"/>
+              <a:gd name="adj" fmla="val 7000"/>
             </a:avLst>
           </a:prstGeom>
           <a:solidFill>
@@ -14620,14 +14729,14 @@
       </p:sp>
       <p:sp>
         <p:nvSpPr>
-          <p:cNvPr id="37" name="Text 35"/>
-          <p:cNvSpPr/>
-          <p:nvPr/>
-        </p:nvSpPr>
-        <p:spPr>
-          <a:xfrm>
-            <a:off x="896112" y="5303520"/>
-            <a:ext cx="10399471" cy="438912"/>
+          <p:cNvPr id="40" name="Text 38"/>
+          <p:cNvSpPr/>
+          <p:nvPr/>
+        </p:nvSpPr>
+        <p:spPr>
+          <a:xfrm>
+            <a:off x="896112" y="5705856"/>
+            <a:ext cx="10399471" cy="347472"/>
           </a:xfrm>
           <a:prstGeom prst="rect">
             <a:avLst/>
